--- a/PPT-version/Data-Engineering/Data-Engineering-讲义.pptx
+++ b/PPT-version/Data-Engineering/Data-Engineering-讲义.pptx
@@ -43367,7 +43367,7 @@
                 </a:solidFill>
                 <a:latin typeface="Calibri"/>
               </a:rPr>
-              <a:t>新客户买不到托管标注：Ground Truth 停接、Google 已关停、iTAG 只白名单；自动标注只四类内置任务、阈值不给调；覆盖率云看不见。</a:t>
+              <a:t>新客户买不到托管标注：Ground Truth 停接、Google 与 Azure 已关停、iTAG 只白名单；自动标注只四类内置任务、阈值不给调；覆盖率云看不见。</a:t>
             </a:r>
           </a:p>
         </p:txBody>
@@ -45403,7 +45403,7 @@
                 </a:solidFill>
                 <a:latin typeface="Calibri"/>
               </a:rPr>
-              <a:t>SageMaker Ground Truth 不接新客户／Google Vertex AI Data Labeling Service 已关停／PAI-iTAG 1.0 白名单＋维护／Azure ML 数据标注仍在</a:t>
+              <a:t>SageMaker Ground Truth 不接新客户／Google Vertex AI Data Labeling Service 已关停／PAI-iTAG 1.0 白名单＋维护／Azure ML 数据标注已退役</a:t>
             </a:r>
           </a:p>
         </p:txBody>
@@ -45658,7 +45658,7 @@
                 </a:solidFill>
                 <a:latin typeface="Calibri"/>
               </a:rPr>
-              <a:t>SageMaker Ground Truth 自动标注（只四类内置任务，阈值预设）／Azure ML 机器学习辅助标注／PAI-iTAG 智能标注（部分大模型模板）／Label Studio 接 ML 后端</a:t>
+              <a:t>SageMaker Ground Truth 自动标注（只四类内置任务，阈值预设）／PAI-iTAG 智能标注（部分大模型模板）／Label Studio 接 ML 后端</a:t>
             </a:r>
           </a:p>
         </p:txBody>
@@ -47699,7 +47699,7 @@
                 </a:solidFill>
                 <a:latin typeface="Calibri"/>
               </a:rPr>
-              <a:t>Amazon S3 Tables 自动维护（压实与快照管理默认全开）／Databricks 预测式优化（存量账号灰度中，预计 2026 年 8 月完成）／自建 Iceberg 自排压实与过期</a:t>
+              <a:t>Amazon S3 Tables 自动维护（压实与快照管理默认全开）／Databricks 预测式优化（存量账号灰度，原定 2026 年 8 月完成仍未宣布）／自建 Iceberg 自排压实与过期</a:t>
             </a:r>
           </a:p>
         </p:txBody>
@@ -53726,7 +53726,7 @@
                 </a:solidFill>
                 <a:latin typeface="Calibri"/>
               </a:rPr>
-              <a:t>Amazon Bedrock 知识库／Azure AI Search／Gemini Enterprise／阿里云百炼数据连接；SharePoint 连接器 preview，Amazon Q Business 停接新客户</a:t>
+              <a:t>Amazon Bedrock 知识库／Azure AI Search／Gemini Enterprise／阿里云百炼数据连接；SharePoint 连接器 preview 且自管库停新建，Amazon Q Business 停接新客户</a:t>
             </a:r>
           </a:p>
         </p:txBody>
